--- a/ai-engineering/05-graph-engineering/slides/graph-engineering.pptx
+++ b/ai-engineering/05-graph-engineering/slides/graph-engineering.pptx
@@ -929,7 +929,7 @@
           <a:lstStyle/>
           <a:p>
             <a:r>
-              <a:t>Static edges can't express "one reviewer per changed file". Send can. The cap matters: Send over an input with no bound is the unbounded fan-out failure from note 07. templates/fan-out-merge.py has a MAX_FANOUT constant and a reducer-removal experiment.</a:t>
+              <a:t>Static edges can't express "one reviewer per changed file". Send can. The cap matters: Send over an input with no bound is the unbounded fan-out failure from note 07. Note 03 has the runnable program with a MAX_FANOUT constant and the reducer-removal experiment.</a:t>
             </a:r>
           </a:p>
           <a:p/>
@@ -4173,13 +4173,13 @@
           <a:lstStyle/>
           <a:p>
             <a:r>
-              <a:t>The full table in graph-engineering.md adds: fan out only when the next step doesn't read the previous step's output; "we need a graph" is often an overloaded verifier; fan-out costs about 15× a chat turn, so measure break-even.</a:t>
+              <a:t>The full table in the README adds: fan out only when the next step doesn't read the previous step's output; "we need a graph" is often an overloaded verifier; fan-out costs about 15× a chat turn, so measure break-even.</a:t>
             </a:r>
           </a:p>
           <a:p/>
           <a:p>
             <a:r>
-              <a:t>Source: graph-engineering.md#rules-of-thumb</a:t>
+              <a:t>Source: README.md#rules-of-thumb</a:t>
             </a:r>
           </a:p>
         </p:txBody>
@@ -11944,7 +11944,7 @@
       </p:sp>
       <p:pic>
         <p:nvPicPr>
-          <p:cNvPr id="13" name="Picture 12" descr="parallel-super-step.png"/>
+          <p:cNvPr id="13" name="Picture 12" descr="langchain-langgraph-docs-parallel-super-step.png"/>
           <p:cNvPicPr>
             <a:picLocks noChangeAspect="1"/>
           </p:cNvPicPr>
@@ -14862,7 +14862,7 @@
       </p:sp>
       <p:pic>
         <p:nvPicPr>
-          <p:cNvPr id="10" name="Picture 9" descr="interrupt-before-after.png"/>
+          <p:cNvPr id="10" name="Picture 9" descr="langchain-langgraph-docs-interrupt-before-after.png"/>
           <p:cNvPicPr>
             <a:picLocks noChangeAspect="1"/>
           </p:cNvPicPr>
@@ -18515,7 +18515,7 @@
       </p:sp>
       <p:pic>
         <p:nvPicPr>
-          <p:cNvPr id="10" name="Picture 9" descr="subgraph-state-patterns.png"/>
+          <p:cNvPr id="10" name="Picture 9" descr="langchain-langgraph-docs-subgraph-state-patterns.png"/>
           <p:cNvPicPr>
             <a:picLocks noChangeAspect="1"/>
           </p:cNvPicPr>
@@ -19244,7 +19244,7 @@
       </p:sp>
       <p:pic>
         <p:nvPicPr>
-          <p:cNvPr id="11" name="Picture 10" descr="fig10-1-1518824970238122185.png"/>
+          <p:cNvPr id="11" name="Picture 10" descr="li-ai-agents-in-depth-fig10-1-6729376423994107223.png"/>
           <p:cNvPicPr>
             <a:picLocks noChangeAspect="1"/>
           </p:cNvPicPr>
@@ -29795,7 +29795,7 @@
       </p:sp>
       <p:pic>
         <p:nvPicPr>
-          <p:cNvPr id="11" name="Picture 10" descr="relationship-properties-713089158773059910.jpg"/>
+          <p:cNvPr id="11" name="Picture 10" descr="kollegger-knowledge-graphs-for-rag-relationship-properties-6441442886402826540.jpg"/>
           <p:cNvPicPr>
             <a:picLocks noChangeAspect="1"/>
           </p:cNvPicPr>
@@ -34627,7 +34627,7 @@
       </p:sp>
       <p:pic>
         <p:nvPicPr>
-          <p:cNvPr id="11" name="Picture 10" descr="extract-enhance-expand-2215254107992643695.jpg"/>
+          <p:cNvPr id="11" name="Picture 10" descr="kollegger-knowledge-graphs-for-rag-extract-enhance-expand-5667364664635402979.jpg"/>
           <p:cNvPicPr>
             <a:picLocks noChangeAspect="1"/>
           </p:cNvPicPr>
@@ -38336,7 +38336,7 @@
       </p:sp>
       <p:pic>
         <p:nvPicPr>
-          <p:cNvPr id="11" name="Picture 10" descr="workflows-vs-agent-1132589251351084139.jpg"/>
+          <p:cNvPr id="11" name="Picture 10" descr="langchain-langgraph-docs-workflows-vs-agent-857903465646698032.jpg"/>
           <p:cNvPicPr>
             <a:picLocks noChangeAspect="1"/>
           </p:cNvPicPr>
@@ -42528,7 +42528,7 @@
       </p:sp>
       <p:pic>
         <p:nvPicPr>
-          <p:cNvPr id="11" name="Picture 10" descr="sec-graph-schema-2766540839126464519.jpg"/>
+          <p:cNvPr id="11" name="Picture 10" descr="kollegger-knowledge-graphs-for-rag-sec-graph-schema-7337066595996683927.jpg"/>
           <p:cNvPicPr>
             <a:picLocks noChangeAspect="1"/>
           </p:cNvPicPr>
@@ -44087,7 +44087,7 @@
                 </a:solidFill>
                 <a:latin typeface="Helvetica Neue"/>
               </a:rPr>
-              <a:t>retry with the error message, at most 3 times</a:t>
+              <a:t>on error, back to Text-to-Cypher with the message, at most 3 times</a:t>
             </a:r>
           </a:p>
         </p:txBody>
@@ -47664,7 +47664,7 @@
                 </a:solidFill>
                 <a:latin typeface="Helvetica Neue"/>
               </a:rPr>
-              <a:t>Contract: </a:t>
+              <a:t>Contract: the </a:t>
             </a:r>
             <a:r>
               <a:rPr sz="1620" i="0" b="0">
@@ -47673,7 +47673,16 @@
                 </a:solidFill>
                 <a:latin typeface="Menlo"/>
               </a:rPr>
-              <a:t>templates/graph-update.schema.json</a:t>
+              <a:t>GraphUpdate</a:t>
+            </a:r>
+            <a:r>
+              <a:rPr sz="1800" i="0" b="0">
+                <a:solidFill>
+                  <a:srgbClr val="1E293B"/>
+                </a:solidFill>
+                <a:latin typeface="Helvetica Neue"/>
+              </a:rPr>
+              <a:t> JSON Schema in note 12</a:t>
             </a:r>
           </a:p>
         </p:txBody>
@@ -53562,7 +53571,7 @@
                 </a:solidFill>
                 <a:latin typeface="Helvetica Neue"/>
               </a:rPr>
-              <a:t>Source: graph-engineering.md#rules-of-thumb</a:t>
+              <a:t>Source: README.md#rules-of-thumb</a:t>
             </a:r>
           </a:p>
         </p:txBody>
@@ -55006,7 +55015,7 @@
                 </a:solidFill>
                 <a:latin typeface="Helvetica Neue"/>
               </a:rPr>
-              <a:t>P1 agent graph labs:</a:t>
+              <a:t>Part A labs (A1–A7):</a:t>
             </a:r>
             <a:r>
               <a:rPr sz="2000" i="0" b="0">
@@ -55015,7 +55024,7 @@
                 </a:solidFill>
                 <a:latin typeface="Helvetica Neue"/>
               </a:rPr>
-              <a:t> seven labs that grow one graph through Parts 1–2</a:t>
+              <a:t> grow one graph through Parts 1–2 of this talk</a:t>
             </a:r>
           </a:p>
         </p:txBody>
@@ -55098,7 +55107,7 @@
                 </a:solidFill>
                 <a:latin typeface="Helvetica Neue"/>
               </a:rPr>
-              <a:t>P2 knowledge graph labs:</a:t>
+              <a:t>Part B labs (B1–B9):</a:t>
             </a:r>
             <a:r>
               <a:rPr sz="2000" i="0" b="0">
@@ -55190,7 +55199,7 @@
                 </a:solidFill>
                 <a:latin typeface="Helvetica Neue"/>
               </a:rPr>
-              <a:t>Templates:</a:t>
+              <a:t>The notes:</a:t>
             </a:r>
             <a:r>
               <a:rPr sz="2000" i="0" b="0">
@@ -55199,52 +55208,7 @@
                 </a:solidFill>
                 <a:latin typeface="Helvetica Neue"/>
               </a:rPr>
-              <a:t> </a:t>
-            </a:r>
-            <a:r>
-              <a:rPr sz="1800" i="0" b="0">
-                <a:solidFill>
-                  <a:srgbClr val="0F7490"/>
-                </a:solidFill>
-                <a:latin typeface="Menlo"/>
-              </a:rPr>
-              <a:t>generate-then-verify.py</a:t>
-            </a:r>
-            <a:r>
-              <a:rPr sz="2000" i="0" b="0">
-                <a:solidFill>
-                  <a:srgbClr val="1E293B"/>
-                </a:solidFill>
-                <a:latin typeface="Helvetica Neue"/>
-              </a:rPr>
-              <a:t>, </a:t>
-            </a:r>
-            <a:r>
-              <a:rPr sz="1800" i="0" b="0">
-                <a:solidFill>
-                  <a:srgbClr val="0F7490"/>
-                </a:solidFill>
-                <a:latin typeface="Menlo"/>
-              </a:rPr>
-              <a:t>fan-out-merge.py</a:t>
-            </a:r>
-            <a:r>
-              <a:rPr sz="2000" i="0" b="0">
-                <a:solidFill>
-                  <a:srgbClr val="1E293B"/>
-                </a:solidFill>
-                <a:latin typeface="Helvetica Neue"/>
-              </a:rPr>
-              <a:t>, </a:t>
-            </a:r>
-            <a:r>
-              <a:rPr sz="1800" i="0" b="0">
-                <a:solidFill>
-                  <a:srgbClr val="0F7490"/>
-                </a:solidFill>
-                <a:latin typeface="Menlo"/>
-              </a:rPr>
-              <a:t>graph-update.schema.json</a:t>
+              <a:t> every slide here has its code and figures in notes 01–13</a:t>
             </a:r>
           </a:p>
         </p:txBody>

--- a/ai-engineering/05-graph-engineering/slides/graph-engineering.pptx
+++ b/ai-engineering/05-graph-engineering/slides/graph-engineering.pptx
@@ -3419,7 +3419,7 @@
           <a:lstStyle/>
           <a:p>
             <a:r>
-              <a:t>Ch15 of the book. Every Part 1 pattern shows up: generate-then-verify, a bounded cycle, typed state that keeps the reasoning and errors, a checkpointer. Adding the validator is the lab exercise.</a:t>
+              <a:t>Ch15 of the book. Every Part 1 pattern shows up: generate-then-verify, a bounded cycle, typed state that keeps the reasoning and errors, a checkpointer. Adding the validator is the missing piece.</a:t>
             </a:r>
           </a:p>
           <a:p/>
@@ -19244,7 +19244,7 @@
       </p:sp>
       <p:pic>
         <p:nvPicPr>
-          <p:cNvPr id="11" name="Picture 10" descr="li-ai-agents-in-depth-fig10-1-6729376423994107223.png"/>
+          <p:cNvPr id="11" name="Picture 10" descr="li-ai-agents-in-depth-fig10-1-10662228167342357.png"/>
           <p:cNvPicPr>
             <a:picLocks noChangeAspect="1"/>
           </p:cNvPicPr>
@@ -29795,7 +29795,7 @@
       </p:sp>
       <p:pic>
         <p:nvPicPr>
-          <p:cNvPr id="11" name="Picture 10" descr="kollegger-knowledge-graphs-for-rag-relationship-properties-6441442886402826540.jpg"/>
+          <p:cNvPr id="11" name="Picture 10" descr="kollegger-knowledge-graphs-for-rag-relationship-properties-2414446679891435919.jpg"/>
           <p:cNvPicPr>
             <a:picLocks noChangeAspect="1"/>
           </p:cNvPicPr>
@@ -34627,7 +34627,7 @@
       </p:sp>
       <p:pic>
         <p:nvPicPr>
-          <p:cNvPr id="11" name="Picture 10" descr="kollegger-knowledge-graphs-for-rag-extract-enhance-expand-5667364664635402979.jpg"/>
+          <p:cNvPr id="11" name="Picture 10" descr="kollegger-knowledge-graphs-for-rag-extract-enhance-expand-6728065550505099101.jpg"/>
           <p:cNvPicPr>
             <a:picLocks noChangeAspect="1"/>
           </p:cNvPicPr>
@@ -38336,7 +38336,7 @@
       </p:sp>
       <p:pic>
         <p:nvPicPr>
-          <p:cNvPr id="11" name="Picture 10" descr="langchain-langgraph-docs-workflows-vs-agent-857903465646698032.jpg"/>
+          <p:cNvPr id="11" name="Picture 10" descr="langchain-langgraph-docs-workflows-vs-agent-4699900580392058193.jpg"/>
           <p:cNvPicPr>
             <a:picLocks noChangeAspect="1"/>
           </p:cNvPicPr>
@@ -42528,7 +42528,7 @@
       </p:sp>
       <p:pic>
         <p:nvPicPr>
-          <p:cNvPr id="11" name="Picture 10" descr="kollegger-knowledge-graphs-for-rag-sec-graph-schema-7337066595996683927.jpg"/>
+          <p:cNvPr id="11" name="Picture 10" descr="kollegger-knowledge-graphs-for-rag-sec-graph-schema-3014872221595198437.jpg"/>
           <p:cNvPicPr>
             <a:picLocks noChangeAspect="1"/>
           </p:cNvPicPr>

--- a/ai-engineering/05-graph-engineering/slides/graph-engineering.pptx
+++ b/ai-engineering/05-graph-engineering/slides/graph-engineering.pptx
@@ -19244,7 +19244,7 @@
       </p:sp>
       <p:pic>
         <p:nvPicPr>
-          <p:cNvPr id="11" name="Picture 10" descr="li-ai-agents-in-depth-fig10-1-10662228167342357.png"/>
+          <p:cNvPr id="11" name="Picture 10" descr="li-ai-agents-in-depth-fig10-1-5024695530741143824.png"/>
           <p:cNvPicPr>
             <a:picLocks noChangeAspect="1"/>
           </p:cNvPicPr>
@@ -29795,7 +29795,7 @@
       </p:sp>
       <p:pic>
         <p:nvPicPr>
-          <p:cNvPr id="11" name="Picture 10" descr="kollegger-knowledge-graphs-for-rag-relationship-properties-2414446679891435919.jpg"/>
+          <p:cNvPr id="11" name="Picture 10" descr="kollegger-knowledge-graphs-for-rag-relationship-properties-5041311738971700093.jpg"/>
           <p:cNvPicPr>
             <a:picLocks noChangeAspect="1"/>
           </p:cNvPicPr>
@@ -34627,7 +34627,7 @@
       </p:sp>
       <p:pic>
         <p:nvPicPr>
-          <p:cNvPr id="11" name="Picture 10" descr="kollegger-knowledge-graphs-for-rag-extract-enhance-expand-6728065550505099101.jpg"/>
+          <p:cNvPr id="11" name="Picture 10" descr="kollegger-knowledge-graphs-for-rag-extract-enhance-expand-1623448948720532570.jpg"/>
           <p:cNvPicPr>
             <a:picLocks noChangeAspect="1"/>
           </p:cNvPicPr>
@@ -38336,7 +38336,7 @@
       </p:sp>
       <p:pic>
         <p:nvPicPr>
-          <p:cNvPr id="11" name="Picture 10" descr="langchain-langgraph-docs-workflows-vs-agent-4699900580392058193.jpg"/>
+          <p:cNvPr id="11" name="Picture 10" descr="langchain-langgraph-docs-workflows-vs-agent-4278963318906235865.jpg"/>
           <p:cNvPicPr>
             <a:picLocks noChangeAspect="1"/>
           </p:cNvPicPr>
@@ -42528,7 +42528,7 @@
       </p:sp>
       <p:pic>
         <p:nvPicPr>
-          <p:cNvPr id="11" name="Picture 10" descr="kollegger-knowledge-graphs-for-rag-sec-graph-schema-3014872221595198437.jpg"/>
+          <p:cNvPr id="11" name="Picture 10" descr="kollegger-knowledge-graphs-for-rag-sec-graph-schema-5733025747302261587.jpg"/>
           <p:cNvPicPr>
             <a:picLocks noChangeAspect="1"/>
           </p:cNvPicPr>

--- a/ai-engineering/05-graph-engineering/slides/graph-engineering.pptx
+++ b/ai-engineering/05-graph-engineering/slides/graph-engineering.pptx
@@ -2048,7 +2048,7 @@
           <a:lstStyle/>
           <a:p>
             <a:r>
-              <a:t>In the book's translation lab the glossary agent mistranslated reasoning. The translator applied it faithfully, and the proofreader, checking against the glossary, saw perfect consistency. Every stage did its job and the error survived all of them. Hence the fix: a reviewer who reads the output against the source.</a:t>
+              <a:t>In the book's translation lab the glossary agent mistranslated reasoning. The translator applied it faithfully, and the proofreader, checking against the glossary, saw perfect consistency. Every stage did its job and the error survived all of them. Hence the fix: a reviewer who reads the output against the source. The 17.2 and 4.4 are error counts relative to a single agent, and Kim et al. read them as descriptive, since amplification did not predict success in their regression.</a:t>
             </a:r>
           </a:p>
           <a:p/>
@@ -2650,7 +2650,7 @@
           <a:lstStyle/>
           <a:p>
             <a:r>
-              <a:t>Evidence often belongs on the edge. In the book's rare-disease graph, each disease and phenotype link carries its reference and frequency as properties, and that single fact is why the chapter picks a property graph over RDF. Type 1 diabetes keeps two IDs, disease and phenotype, because its role depends on context.</a:t>
+              <a:t>This is the SEC graph we will build. Evidence often belongs on the edge. In the book's rare-disease graph, each disease and phenotype link carries its reference and frequency as properties, and that single fact is why the chapter picks a property graph over RDF. Type 1 diabetes keeps two IDs, disease and phenotype, because its role depends on context.</a:t>
             </a:r>
           </a:p>
           <a:p/>
@@ -21734,7 +21734,7 @@
       </p:sp>
       <p:pic>
         <p:nvPicPr>
-          <p:cNvPr id="14" name="Picture 13" descr="li-ai-agents-in-depth-fig10-1-4865542496402175994-4537469623369892488.jpg"/>
+          <p:cNvPr id="14" name="Picture 13" descr="li-ai-agents-in-depth-fig10-1-4090164658217113067-4208216384343912543.jpg"/>
           <p:cNvPicPr>
             <a:picLocks noChangeAspect="1"/>
           </p:cNvPicPr>
@@ -34723,8 +34723,8 @@
         </p:nvSpPr>
         <p:spPr>
           <a:xfrm>
-            <a:off x="803768" y="1417320"/>
-            <a:ext cx="5550523" cy="3712463"/>
+            <a:off x="1030318" y="1417320"/>
+            <a:ext cx="5097423" cy="3712463"/>
           </a:xfrm>
           <a:prstGeom prst="rect">
             <a:avLst/>
@@ -34763,7 +34763,7 @@
       </p:sp>
       <p:pic>
         <p:nvPicPr>
-          <p:cNvPr id="14" name="Picture 13" descr="kollegger-knowledge-graphs-for-rag-relationship-properties-4670970900893234906.jpg"/>
+          <p:cNvPr id="14" name="Picture 13" descr="kollegger-knowledge-graphs-for-rag-sec-graph-schema-2054565072574611712.jpg"/>
           <p:cNvPicPr>
             <a:picLocks noChangeAspect="1"/>
           </p:cNvPicPr>
@@ -34777,8 +34777,8 @@
         </p:blipFill>
         <p:spPr>
           <a:xfrm>
-            <a:off x="858632" y="1472184"/>
-            <a:ext cx="5440795" cy="3602735"/>
+            <a:off x="1085182" y="1472184"/>
+            <a:ext cx="4987695" cy="3602735"/>
           </a:xfrm>
           <a:prstGeom prst="rect">
             <a:avLst/>
@@ -34793,7 +34793,7 @@
         </p:nvSpPr>
         <p:spPr>
           <a:xfrm>
-            <a:off x="502920" y="5212080"/>
+            <a:off x="502920" y="5212079"/>
             <a:ext cx="6152220" cy="365760"/>
           </a:xfrm>
           <a:prstGeom prst="rect">
@@ -34969,7 +34969,7 @@
         <p:spPr>
           <a:xfrm>
             <a:off x="7340940" y="1911095"/>
-            <a:ext cx="4347834" cy="694943"/>
+            <a:ext cx="4347834" cy="996696"/>
           </a:xfrm>
           <a:prstGeom prst="rect">
             <a:avLst/>
@@ -35003,7 +35003,34 @@
                 </a:solidFill>
                 <a:latin typeface="Helvetica Neue"/>
               </a:rPr>
-              <a:t> are typed and directed, and carry properties too</a:t>
+              <a:t> are typed and directed, and carry properties: </a:t>
+            </a:r>
+            <a:r>
+              <a:rPr sz="1620" i="0" b="0">
+                <a:solidFill>
+                  <a:srgbClr val="0F7490"/>
+                </a:solidFill>
+                <a:latin typeface="Menlo"/>
+              </a:rPr>
+              <a:t>value</a:t>
+            </a:r>
+            <a:r>
+              <a:rPr sz="1800" i="0" b="0">
+                <a:solidFill>
+                  <a:srgbClr val="1E293B"/>
+                </a:solidFill>
+                <a:latin typeface="Helvetica Neue"/>
+              </a:rPr>
+              <a:t> sits on </a:t>
+            </a:r>
+            <a:r>
+              <a:rPr sz="1620" i="0" b="0">
+                <a:solidFill>
+                  <a:srgbClr val="0F7490"/>
+                </a:solidFill>
+                <a:latin typeface="Menlo"/>
+              </a:rPr>
+              <a:t>OWNS_STOCK_IN</a:t>
             </a:r>
           </a:p>
         </p:txBody>
@@ -35016,7 +35043,7 @@
         </p:nvSpPr>
         <p:spPr>
           <a:xfrm>
-            <a:off x="7020900" y="2738628"/>
+            <a:off x="7020900" y="3040380"/>
             <a:ext cx="96012" cy="96012"/>
           </a:xfrm>
           <a:prstGeom prst="rect">
@@ -35060,7 +35087,7 @@
         </p:nvSpPr>
         <p:spPr>
           <a:xfrm>
-            <a:off x="7340940" y="2651760"/>
+            <a:off x="7340940" y="2953512"/>
             <a:ext cx="4347834" cy="694943"/>
           </a:xfrm>
           <a:prstGeom prst="rect">
@@ -35108,7 +35135,7 @@
         </p:nvSpPr>
         <p:spPr>
           <a:xfrm>
-            <a:off x="7020900" y="3479291"/>
+            <a:off x="7020900" y="3781044"/>
             <a:ext cx="96012" cy="96012"/>
           </a:xfrm>
           <a:prstGeom prst="rect">
@@ -35152,7 +35179,7 @@
         </p:nvSpPr>
         <p:spPr>
           <a:xfrm>
-            <a:off x="7340940" y="3392423"/>
+            <a:off x="7340940" y="3694176"/>
             <a:ext cx="4347834" cy="393191"/>
           </a:xfrm>
           <a:prstGeom prst="rect">
@@ -39189,7 +39216,7 @@
       </p:sp>
       <p:pic>
         <p:nvPicPr>
-          <p:cNvPr id="14" name="Picture 13" descr="kollegger-knowledge-graphs-for-rag-extract-enhance-expand-4924723180762686328.jpg"/>
+          <p:cNvPr id="14" name="Picture 13" descr="kollegger-knowledge-graphs-for-rag-extract-enhance-expand-3183134450415555640.jpg"/>
           <p:cNvPicPr>
             <a:picLocks noChangeAspect="1"/>
           </p:cNvPicPr>
@@ -40218,7 +40245,7 @@
       </p:sp>
       <p:pic>
         <p:nvPicPr>
-          <p:cNvPr id="14" name="Picture 13" descr="langchain-langgraph-docs-workflows-vs-agent-603370678299354668.jpg"/>
+          <p:cNvPr id="14" name="Picture 13" descr="langchain-langgraph-docs-workflows-vs-agent-5773793843898208957.jpg"/>
           <p:cNvPicPr>
             <a:picLocks noChangeAspect="1"/>
           </p:cNvPicPr>
@@ -55581,7 +55608,7 @@
       </p:sp>
       <p:pic>
         <p:nvPicPr>
-          <p:cNvPr id="14" name="Picture 13" descr="kim-2025-scaling-agent-systems-fig2-4865193809155543405.jpg"/>
+          <p:cNvPr id="14" name="Picture 13" descr="kim-2025-scaling-agent-systems-fig2-6468166244238961163.jpg"/>
           <p:cNvPicPr>
             <a:picLocks noChangeAspect="1"/>
           </p:cNvPicPr>
